--- a/EDA Project/Exploratory-Data-Analysis-on-Music-Mental-Health-Dataset.pptx
+++ b/EDA Project/Exploratory-Data-Analysis-on-Music-Mental-Health-Dataset.pptx
@@ -8,7 +8,7 @@
     <p:notesMasterId r:id="rId11"/>
   </p:notesMasterIdLst>
   <p:sldIdLst>
-    <p:sldId id="256" r:id="rId2"/>
+    <p:sldId id="265" r:id="rId2"/>
     <p:sldId id="257" r:id="rId3"/>
     <p:sldId id="258" r:id="rId4"/>
     <p:sldId id="259" r:id="rId5"/>
@@ -2055,7 +2055,7 @@
 
 <file path=ppt/slides/slide1.xml><?xml version="1.0" encoding="utf-8"?>
 <p:sld xmlns:a="http://schemas.openxmlformats.org/drawingml/2006/main" xmlns:r="http://schemas.openxmlformats.org/officeDocument/2006/relationships" xmlns:p="http://schemas.openxmlformats.org/presentationml/2006/main">
-  <p:cSld name="Slide 1">
+  <p:cSld>
     <p:spTree>
       <p:nvGrpSpPr>
         <p:cNvPr id="1" name=""/>
@@ -2078,7 +2078,7 @@
         </p:nvSpPr>
         <p:spPr>
           <a:xfrm>
-            <a:off x="531320" y="993286"/>
+            <a:off x="496119" y="1098352"/>
             <a:ext cx="7970565" cy="1222772"/>
           </a:xfrm>
           <a:prstGeom prst="rect">
@@ -2142,8 +2142,8 @@
         </p:nvSpPr>
         <p:spPr>
           <a:xfrm>
-            <a:off x="531320" y="2864197"/>
-            <a:ext cx="3902943" cy="965597"/>
+            <a:off x="496119" y="2693194"/>
+            <a:ext cx="2487216" cy="965597"/>
           </a:xfrm>
           <a:prstGeom prst="roundRect">
             <a:avLst>
@@ -2179,7 +2179,7 @@
         </p:blipFill>
         <p:spPr>
           <a:xfrm>
-            <a:off x="637877" y="3000152"/>
+            <a:off x="637877" y="2886745"/>
             <a:ext cx="221456" cy="177180"/>
           </a:xfrm>
           <a:prstGeom prst="rect">
@@ -2195,7 +2195,7 @@
         </p:nvSpPr>
         <p:spPr>
           <a:xfrm>
-            <a:off x="1001092" y="2983781"/>
+            <a:off x="1001092" y="2870374"/>
             <a:ext cx="2229222" cy="221456"/>
           </a:xfrm>
           <a:prstGeom prst="rect">
@@ -2237,8 +2237,8 @@
         </p:nvSpPr>
         <p:spPr>
           <a:xfrm>
-            <a:off x="1001092" y="3346996"/>
-            <a:ext cx="3713411" cy="226814"/>
+            <a:off x="1001092" y="3233589"/>
+            <a:ext cx="2297683" cy="226814"/>
           </a:xfrm>
           <a:prstGeom prst="rect">
             <a:avLst/>
@@ -2279,12 +2279,12 @@
         </p:nvSpPr>
         <p:spPr>
           <a:xfrm>
-            <a:off x="4735520" y="2864197"/>
-            <a:ext cx="3902943" cy="965597"/>
+            <a:off x="3333973" y="2693194"/>
+            <a:ext cx="2486323" cy="1192411"/>
           </a:xfrm>
           <a:prstGeom prst="roundRect">
             <a:avLst>
-              <a:gd name="adj" fmla="val 13214"/>
+              <a:gd name="adj" fmla="val 10700"/>
             </a:avLst>
           </a:prstGeom>
           <a:solidFill>
@@ -2296,7 +2296,7 @@
           <a:bodyPr/>
           <a:lstStyle/>
           <a:p>
-            <a:endParaRPr lang="en-IN" dirty="0"/>
+            <a:endParaRPr lang="en-IN"/>
           </a:p>
         </p:txBody>
       </p:sp>
@@ -2316,7 +2316,7 @@
         </p:blipFill>
         <p:spPr>
           <a:xfrm>
-            <a:off x="4891460" y="3000152"/>
+            <a:off x="3475732" y="2886745"/>
             <a:ext cx="221456" cy="177180"/>
           </a:xfrm>
           <a:prstGeom prst="rect">
@@ -2332,7 +2332,7 @@
         </p:nvSpPr>
         <p:spPr>
           <a:xfrm>
-            <a:off x="5254675" y="2983781"/>
+            <a:off x="3838947" y="2870374"/>
             <a:ext cx="2229222" cy="221456"/>
           </a:xfrm>
           <a:prstGeom prst="rect">
@@ -2374,8 +2374,8 @@
         </p:nvSpPr>
         <p:spPr>
           <a:xfrm>
-            <a:off x="5254675" y="3346996"/>
-            <a:ext cx="3713411" cy="226814"/>
+            <a:off x="3838947" y="3233589"/>
+            <a:ext cx="1839590" cy="453628"/>
           </a:xfrm>
           <a:prstGeom prst="rect">
             <a:avLst/>
@@ -2384,7 +2384,9 @@
           <a:ln/>
         </p:spPr>
         <p:txBody>
-          <a:bodyPr wrap="none" lIns="0" tIns="0" rIns="0" bIns="0" rtlCol="0" anchor="t"/>
+          <a:bodyPr wrap="square" lIns="0" tIns="0" rIns="0" bIns="0" rtlCol="0" anchor="t">
+            <a:normAutofit/>
+          </a:bodyPr>
           <a:lstStyle/>
           <a:p>
             <a:pPr marL="0" indent="0" algn="l">
@@ -2410,10 +2412,149 @@
       </p:sp>
       <p:sp>
         <p:nvSpPr>
-          <p:cNvPr id="11" name="Rectangle 10">
+          <p:cNvPr id="11" name="Shape 7"/>
+          <p:cNvSpPr/>
+          <p:nvPr/>
+        </p:nvSpPr>
+        <p:spPr>
+          <a:xfrm>
+            <a:off x="6170935" y="2693194"/>
+            <a:ext cx="2486323" cy="1192411"/>
+          </a:xfrm>
+          <a:prstGeom prst="roundRect">
+            <a:avLst>
+              <a:gd name="adj" fmla="val 10700"/>
+            </a:avLst>
+          </a:prstGeom>
+          <a:solidFill>
+            <a:srgbClr val="DFEEE2"/>
+          </a:solidFill>
+          <a:ln/>
+        </p:spPr>
+        <p:txBody>
+          <a:bodyPr/>
+          <a:lstStyle/>
+          <a:p>
+            <a:endParaRPr lang="en-IN"/>
+          </a:p>
+        </p:txBody>
+      </p:sp>
+      <p:pic>
+        <p:nvPicPr>
+          <p:cNvPr id="12" name="Image 2" descr="preencoded.png"/>
+          <p:cNvPicPr>
+            <a:picLocks noChangeAspect="1"/>
+          </p:cNvPicPr>
+          <p:nvPr/>
+        </p:nvPicPr>
+        <p:blipFill>
+          <a:blip r:embed="rId5"/>
+          <a:stretch>
+            <a:fillRect/>
+          </a:stretch>
+        </p:blipFill>
+        <p:spPr>
+          <a:xfrm>
+            <a:off x="6312694" y="2886745"/>
+            <a:ext cx="221456" cy="177180"/>
+          </a:xfrm>
+          <a:prstGeom prst="rect">
+            <a:avLst/>
+          </a:prstGeom>
+        </p:spPr>
+      </p:pic>
+      <p:sp>
+        <p:nvSpPr>
+          <p:cNvPr id="13" name="Text 8"/>
+          <p:cNvSpPr/>
+          <p:nvPr/>
+        </p:nvSpPr>
+        <p:spPr>
+          <a:xfrm>
+            <a:off x="6675909" y="2870374"/>
+            <a:ext cx="2229222" cy="221456"/>
+          </a:xfrm>
+          <a:prstGeom prst="rect">
+            <a:avLst/>
+          </a:prstGeom>
+          <a:noFill/>
+          <a:ln/>
+        </p:spPr>
+        <p:txBody>
+          <a:bodyPr wrap="none" lIns="0" tIns="0" rIns="0" bIns="0" rtlCol="0" anchor="t"/>
+          <a:lstStyle/>
+          <a:p>
+            <a:pPr marL="0" indent="0" algn="l">
+              <a:lnSpc>
+                <a:spcPct val="104000"/>
+              </a:lnSpc>
+              <a:buNone/>
+            </a:pPr>
+            <a:r>
+              <a:rPr lang="en-US" sz="1350" dirty="0">
+                <a:solidFill>
+                  <a:srgbClr val="000000"/>
+                </a:solidFill>
+                <a:latin typeface="Fraunces ExtraBold" pitchFamily="34" charset="0"/>
+                <a:ea typeface="Fraunces ExtraBold" pitchFamily="34" charset="-122"/>
+                <a:cs typeface="Fraunces ExtraBold" pitchFamily="34" charset="-120"/>
+              </a:rPr>
+              <a:t>Program</a:t>
+            </a:r>
+            <a:endParaRPr lang="en-US" sz="1350" dirty="0"/>
+          </a:p>
+        </p:txBody>
+      </p:sp>
+      <p:sp>
+        <p:nvSpPr>
+          <p:cNvPr id="14" name="Text 9"/>
+          <p:cNvSpPr/>
+          <p:nvPr/>
+        </p:nvSpPr>
+        <p:spPr>
+          <a:xfrm>
+            <a:off x="6675909" y="3233589"/>
+            <a:ext cx="1839590" cy="453628"/>
+          </a:xfrm>
+          <a:prstGeom prst="rect">
+            <a:avLst/>
+          </a:prstGeom>
+          <a:noFill/>
+          <a:ln/>
+        </p:spPr>
+        <p:txBody>
+          <a:bodyPr wrap="square" lIns="0" tIns="0" rIns="0" bIns="0" rtlCol="0" anchor="t">
+            <a:normAutofit/>
+          </a:bodyPr>
+          <a:lstStyle/>
+          <a:p>
+            <a:pPr marL="0" indent="0" algn="l">
+              <a:lnSpc>
+                <a:spcPct val="133000"/>
+              </a:lnSpc>
+              <a:buNone/>
+            </a:pPr>
+            <a:r>
+              <a:rPr lang="en-US" sz="1100" b="1" dirty="0">
+                <a:solidFill>
+                  <a:srgbClr val="000000"/>
+                </a:solidFill>
+                <a:latin typeface="Nobile" pitchFamily="34" charset="0"/>
+                <a:ea typeface="Nobile" pitchFamily="34" charset="-122"/>
+                <a:cs typeface="Nobile" pitchFamily="34" charset="-120"/>
+              </a:rPr>
+              <a:t>B. Tech in CSE (DS&amp;AI), 4th Semester</a:t>
+            </a:r>
+            <a:endParaRPr lang="en-US" sz="1100" dirty="0"/>
+          </a:p>
+        </p:txBody>
+      </p:sp>
+      <p:sp>
+        <p:nvSpPr>
+          <p:cNvPr id="15" name="Rectangle 14">
             <a:extLst>
               <a:ext uri="{FF2B5EF4-FFF2-40B4-BE49-F238E27FC236}">
-                <a16:creationId xmlns:a16="http://schemas.microsoft.com/office/drawing/2014/main" id="{18CF8E4D-AF78-1A38-68D5-1AD9B4F09A40}"/>
+                <a16:creationId xmlns:a16="http://schemas.microsoft.com/office/drawing/2014/main" id="{67D9C500-C761-E9BA-10E2-37C65050AFD5}"/>
               </a:ext>
             </a:extLst>
           </p:cNvPr>
